--- a/kula-slides-export.pptx
+++ b/kula-slides-export.pptx
@@ -2122,7 +2122,7 @@
                 <a:ea typeface="Georgia" pitchFamily="34" charset="-122"/>
                 <a:cs typeface="Georgia" pitchFamily="34" charset="-120"/>
               </a:rPr>
-              <a:t>Could you spend more time with your loved ones during the workday?</a:t>
+              <a:t>What if your loved ones </a:t>
             </a:r>
           </a:p>
           <a:p>
